--- a/cloudflare-deploy/public/library/teacher/teacher-en.pptx
+++ b/cloudflare-deploy/public/library/teacher/teacher-en.pptx
@@ -51,6 +51,7 @@
     <p:sldId id="299" r:id="rId50"/>
     <p:sldId id="300" r:id="rId51"/>
     <p:sldId id="301" r:id="rId52"/>
+    <p:sldId id="302" r:id="rId53"/>
   </p:sldIdLst>
   <p:sldSz cx="12191695" cy="6858000" type="screen4x3"/>
   <p:notesSz cx="6858000" cy="9144000"/>
@@ -27849,6 +27850,167 @@
           </a:p>
         </p:txBody>
       </p:sp>
+      <p:sp>
+        <p:nvSpPr>
+          <p:cNvPr id="89" name="Rounded Rectangle 88"/>
+          <p:cNvSpPr/>
+          <p:nvPr/>
+        </p:nvSpPr>
+        <p:spPr>
+          <a:xfrm>
+            <a:off x="6141567" y="4224528"/>
+            <a:ext cx="384048" cy="228600"/>
+          </a:xfrm>
+          <a:prstGeom prst="roundRect">
+            <a:avLst/>
+          </a:prstGeom>
+          <a:solidFill>
+            <a:srgbClr val="EA580C"/>
+          </a:solidFill>
+          <a:ln>
+            <a:noFill/>
+          </a:ln>
+          <a:effectLst/>
+        </p:spPr>
+        <p:style>
+          <a:lnRef idx="1">
+            <a:schemeClr val="accent1"/>
+          </a:lnRef>
+          <a:fillRef idx="3">
+            <a:schemeClr val="accent1"/>
+          </a:fillRef>
+          <a:effectRef idx="2">
+            <a:schemeClr val="accent1"/>
+          </a:effectRef>
+          <a:fontRef idx="minor">
+            <a:schemeClr val="lt1"/>
+          </a:fontRef>
+        </p:style>
+        <p:txBody>
+          <a:bodyPr rtlCol="0" anchor="ctr"/>
+          <a:lstStyle/>
+          <a:p>
+            <a:pPr algn="ctr"/>
+          </a:p>
+        </p:txBody>
+      </p:sp>
+      <p:sp>
+        <p:nvSpPr>
+          <p:cNvPr id="90" name="TextBox 89"/>
+          <p:cNvSpPr txBox="1"/>
+          <p:nvPr/>
+        </p:nvSpPr>
+        <p:spPr>
+          <a:xfrm>
+            <a:off x="6141567" y="4206240"/>
+            <a:ext cx="384048" cy="265176"/>
+          </a:xfrm>
+          <a:prstGeom prst="rect">
+            <a:avLst/>
+          </a:prstGeom>
+          <a:noFill/>
+        </p:spPr>
+        <p:txBody>
+          <a:bodyPr wrap="square" anchor="ctr">
+            <a:spAutoFit/>
+          </a:bodyPr>
+          <a:lstStyle/>
+          <a:p>
+            <a:pPr algn="ctr">
+              <a:lnSpc>
+                <a:spcPct val="100000"/>
+              </a:lnSpc>
+            </a:pPr>
+            <a:r>
+              <a:rPr sz="900" b="1">
+                <a:solidFill>
+                  <a:srgbClr val="FFFFFF"/>
+                </a:solidFill>
+                <a:latin typeface="Malgun Gothic"/>
+              </a:rPr>
+              <a:t>21</a:t>
+            </a:r>
+          </a:p>
+        </p:txBody>
+      </p:sp>
+      <p:sp>
+        <p:nvSpPr>
+          <p:cNvPr id="91" name="TextBox 90"/>
+          <p:cNvSpPr txBox="1"/>
+          <p:nvPr/>
+        </p:nvSpPr>
+        <p:spPr>
+          <a:xfrm>
+            <a:off x="6617055" y="4197096"/>
+            <a:ext cx="4587087" cy="274320"/>
+          </a:xfrm>
+          <a:prstGeom prst="rect">
+            <a:avLst/>
+          </a:prstGeom>
+          <a:noFill/>
+        </p:spPr>
+        <p:txBody>
+          <a:bodyPr wrap="square" anchor="ctr">
+            <a:spAutoFit/>
+          </a:bodyPr>
+          <a:lstStyle/>
+          <a:p>
+            <a:pPr algn="l">
+              <a:lnSpc>
+                <a:spcPct val="100000"/>
+              </a:lnSpc>
+            </a:pPr>
+            <a:r>
+              <a:rPr sz="1050" b="1">
+                <a:solidFill>
+                  <a:srgbClr val="334155"/>
+                </a:solidFill>
+                <a:latin typeface="Malgun Gothic"/>
+              </a:rPr>
+              <a:t>Reports · Lesson Management</a:t>
+            </a:r>
+          </a:p>
+        </p:txBody>
+      </p:sp>
+      <p:sp>
+        <p:nvSpPr>
+          <p:cNvPr id="92" name="TextBox 91"/>
+          <p:cNvSpPr txBox="1"/>
+          <p:nvPr/>
+        </p:nvSpPr>
+        <p:spPr>
+          <a:xfrm>
+            <a:off x="11213287" y="4197096"/>
+            <a:ext cx="457200" cy="274320"/>
+          </a:xfrm>
+          <a:prstGeom prst="rect">
+            <a:avLst/>
+          </a:prstGeom>
+          <a:noFill/>
+        </p:spPr>
+        <p:txBody>
+          <a:bodyPr wrap="square" anchor="ctr">
+            <a:spAutoFit/>
+          </a:bodyPr>
+          <a:lstStyle/>
+          <a:p>
+            <a:pPr algn="r">
+              <a:lnSpc>
+                <a:spcPct val="100000"/>
+              </a:lnSpc>
+            </a:pPr>
+            <a:r>
+              <a:rPr sz="1050" b="1">
+                <a:solidFill>
+                  <a:srgbClr val="EA580C"/>
+                </a:solidFill>
+                <a:latin typeface="Malgun Gothic"/>
+              </a:rPr>
+              <a:t>25</a:t>
+            </a:r>
+          </a:p>
+        </p:txBody>
+      </p:sp>
     </p:spTree>
   </p:cSld>
   <p:clrMapOvr>
@@ -38268,7 +38430,7 @@
                 </a:solidFill>
                 <a:latin typeface="Malgun Gothic"/>
               </a:rPr>
-              <a:t>21</a:t>
+              <a:t>22</a:t>
             </a:r>
           </a:p>
         </p:txBody>
@@ -38307,7 +38469,7 @@
                 </a:solidFill>
                 <a:latin typeface="Malgun Gothic"/>
               </a:rPr>
-              <a:t>Reports · Lesson Management</a:t>
+              <a:t>Handle Lesson Postpones</a:t>
             </a:r>
           </a:p>
         </p:txBody>
@@ -38346,7 +38508,7 @@
                 </a:solidFill>
                 <a:latin typeface="Malgun Gothic"/>
               </a:rPr>
-              <a:t>25</a:t>
+              <a:t>26</a:t>
             </a:r>
           </a:p>
         </p:txBody>
@@ -38429,7 +38591,7 @@
                 </a:solidFill>
                 <a:latin typeface="Malgun Gothic"/>
               </a:rPr>
-              <a:t>22</a:t>
+              <a:t>23</a:t>
             </a:r>
           </a:p>
         </p:txBody>
@@ -38468,7 +38630,7 @@
                 </a:solidFill>
                 <a:latin typeface="Malgun Gothic"/>
               </a:rPr>
-              <a:t>Handle Lesson Postpones</a:t>
+              <a:t>Support · Inquiries</a:t>
             </a:r>
           </a:p>
         </p:txBody>
@@ -38507,7 +38669,7 @@
                 </a:solidFill>
                 <a:latin typeface="Malgun Gothic"/>
               </a:rPr>
-              <a:t>26</a:t>
+              <a:t>27</a:t>
             </a:r>
           </a:p>
         </p:txBody>
@@ -38590,7 +38752,7 @@
                 </a:solidFill>
                 <a:latin typeface="Malgun Gothic"/>
               </a:rPr>
-              <a:t>23</a:t>
+              <a:t>24</a:t>
             </a:r>
           </a:p>
         </p:txBody>
@@ -38629,7 +38791,7 @@
                 </a:solidFill>
                 <a:latin typeface="Malgun Gothic"/>
               </a:rPr>
-              <a:t>Support · Inquiries</a:t>
+              <a:t>Korea·Philippines Dual Clock</a:t>
             </a:r>
           </a:p>
         </p:txBody>
@@ -38668,7 +38830,7 @@
                 </a:solidFill>
                 <a:latin typeface="Malgun Gothic"/>
               </a:rPr>
-              <a:t>27</a:t>
+              <a:t>28</a:t>
             </a:r>
           </a:p>
         </p:txBody>
@@ -38751,7 +38913,7 @@
                 </a:solidFill>
                 <a:latin typeface="Malgun Gothic"/>
               </a:rPr>
-              <a:t>24</a:t>
+              <a:t>25</a:t>
             </a:r>
           </a:p>
         </p:txBody>
@@ -38790,7 +38952,7 @@
                 </a:solidFill>
                 <a:latin typeface="Malgun Gothic"/>
               </a:rPr>
-              <a:t>Korea·Philippines Dual Clock</a:t>
+              <a:t>Chinese Pronunciation Coach</a:t>
             </a:r>
           </a:p>
         </p:txBody>
@@ -38829,7 +38991,7 @@
                 </a:solidFill>
                 <a:latin typeface="Malgun Gothic"/>
               </a:rPr>
-              <a:t>28</a:t>
+              <a:t>29</a:t>
             </a:r>
           </a:p>
         </p:txBody>
@@ -38912,7 +39074,7 @@
                 </a:solidFill>
                 <a:latin typeface="Malgun Gothic"/>
               </a:rPr>
-              <a:t>25</a:t>
+              <a:t>26</a:t>
             </a:r>
           </a:p>
         </p:txBody>
@@ -38951,7 +39113,7 @@
                 </a:solidFill>
                 <a:latin typeface="Malgun Gothic"/>
               </a:rPr>
-              <a:t>Chinese Pronunciation Coach</a:t>
+              <a:t>AI Coaching After Class</a:t>
             </a:r>
           </a:p>
         </p:txBody>
@@ -38990,7 +39152,7 @@
                 </a:solidFill>
                 <a:latin typeface="Malgun Gothic"/>
               </a:rPr>
-              <a:t>29</a:t>
+              <a:t>30</a:t>
             </a:r>
           </a:p>
         </p:txBody>
@@ -39073,7 +39235,7 @@
                 </a:solidFill>
                 <a:latin typeface="Malgun Gothic"/>
               </a:rPr>
-              <a:t>26</a:t>
+              <a:t>27</a:t>
             </a:r>
           </a:p>
         </p:txBody>
@@ -39112,7 +39274,7 @@
                 </a:solidFill>
                 <a:latin typeface="Malgun Gothic"/>
               </a:rPr>
-              <a:t>AI Coaching After Class</a:t>
+              <a:t>Tab Sync (Your Screen Leads)</a:t>
             </a:r>
           </a:p>
         </p:txBody>
@@ -39151,7 +39313,7 @@
                 </a:solidFill>
                 <a:latin typeface="Malgun Gothic"/>
               </a:rPr>
-              <a:t>30</a:t>
+              <a:t>31</a:t>
             </a:r>
           </a:p>
         </p:txBody>
@@ -39234,7 +39396,7 @@
                 </a:solidFill>
                 <a:latin typeface="Malgun Gothic"/>
               </a:rPr>
-              <a:t>27</a:t>
+              <a:t>28</a:t>
             </a:r>
           </a:p>
         </p:txBody>
@@ -39273,7 +39435,7 @@
                 </a:solidFill>
                 <a:latin typeface="Malgun Gothic"/>
               </a:rPr>
-              <a:t>Tab Sync (Your Screen Leads)</a:t>
+              <a:t>1:1 Private Chat &amp; File Sharing</a:t>
             </a:r>
           </a:p>
         </p:txBody>
@@ -39312,7 +39474,7 @@
                 </a:solidFill>
                 <a:latin typeface="Malgun Gothic"/>
               </a:rPr>
-              <a:t>31</a:t>
+              <a:t>32</a:t>
             </a:r>
           </a:p>
         </p:txBody>
@@ -39395,7 +39557,7 @@
                 </a:solidFill>
                 <a:latin typeface="Malgun Gothic"/>
               </a:rPr>
-              <a:t>28</a:t>
+              <a:t>29</a:t>
             </a:r>
           </a:p>
         </p:txBody>
@@ -39434,7 +39596,7 @@
                 </a:solidFill>
                 <a:latin typeface="Malgun Gothic"/>
               </a:rPr>
-              <a:t>1:1 Private Chat &amp; File Sharing</a:t>
+              <a:t>Requesting a Postpone / Change</a:t>
             </a:r>
           </a:p>
         </p:txBody>
@@ -39473,7 +39635,7 @@
                 </a:solidFill>
                 <a:latin typeface="Malgun Gothic"/>
               </a:rPr>
-              <a:t>32</a:t>
+              <a:t>33</a:t>
             </a:r>
           </a:p>
         </p:txBody>
@@ -39556,7 +39718,7 @@
                 </a:solidFill>
                 <a:latin typeface="Malgun Gothic"/>
               </a:rPr>
-              <a:t>29</a:t>
+              <a:t>30</a:t>
             </a:r>
           </a:p>
         </p:txBody>
@@ -39595,7 +39757,7 @@
                 </a:solidFill>
                 <a:latin typeface="Malgun Gothic"/>
               </a:rPr>
-              <a:t>Requesting a Postpone / Change</a:t>
+              <a:t>Checking My Lesson-Fee Settlement</a:t>
             </a:r>
           </a:p>
         </p:txBody>
@@ -39634,7 +39796,7 @@
                 </a:solidFill>
                 <a:latin typeface="Malgun Gothic"/>
               </a:rPr>
-              <a:t>33</a:t>
+              <a:t>34</a:t>
             </a:r>
           </a:p>
         </p:txBody>
@@ -39717,7 +39879,7 @@
                 </a:solidFill>
                 <a:latin typeface="Malgun Gothic"/>
               </a:rPr>
-              <a:t>30</a:t>
+              <a:t>31</a:t>
             </a:r>
           </a:p>
         </p:txBody>
@@ -39756,7 +39918,7 @@
                 </a:solidFill>
                 <a:latin typeface="Malgun Gothic"/>
               </a:rPr>
-              <a:t>Checking My Lesson-Fee Settlement</a:t>
+              <a:t>Three class controls (focus · background lock · exit guard)</a:t>
             </a:r>
           </a:p>
         </p:txBody>
@@ -39795,7 +39957,7 @@
                 </a:solidFill>
                 <a:latin typeface="Malgun Gothic"/>
               </a:rPr>
-              <a:t>34</a:t>
+              <a:t>35</a:t>
             </a:r>
           </a:p>
         </p:txBody>
@@ -39878,7 +40040,7 @@
                 </a:solidFill>
                 <a:latin typeface="Malgun Gothic"/>
               </a:rPr>
-              <a:t>31</a:t>
+              <a:t>32</a:t>
             </a:r>
           </a:p>
         </p:txBody>
@@ -39917,7 +40079,7 @@
                 </a:solidFill>
                 <a:latin typeface="Malgun Gothic"/>
               </a:rPr>
-              <a:t>Three class controls (focus · background lock · exit guard)</a:t>
+              <a:t>Textbook PDF — annotations that stay · faster page jumps</a:t>
             </a:r>
           </a:p>
         </p:txBody>
@@ -39956,7 +40118,7 @@
                 </a:solidFill>
                 <a:latin typeface="Malgun Gothic"/>
               </a:rPr>
-              <a:t>35</a:t>
+              <a:t>36</a:t>
             </a:r>
           </a:p>
         </p:txBody>
@@ -40039,7 +40201,7 @@
                 </a:solidFill>
                 <a:latin typeface="Malgun Gothic"/>
               </a:rPr>
-              <a:t>32</a:t>
+              <a:t>33</a:t>
             </a:r>
           </a:p>
         </p:txBody>
@@ -40078,7 +40240,7 @@
                 </a:solidFill>
                 <a:latin typeface="Malgun Gothic"/>
               </a:rPr>
-              <a:t>Textbook PDF — annotations that stay · faster page jumps</a:t>
+              <a:t>It rides out a slow connection by itself</a:t>
             </a:r>
           </a:p>
         </p:txBody>
@@ -40117,7 +40279,7 @@
                 </a:solidFill>
                 <a:latin typeface="Malgun Gothic"/>
               </a:rPr>
-              <a:t>36</a:t>
+              <a:t>37</a:t>
             </a:r>
           </a:p>
         </p:txBody>
@@ -40200,7 +40362,7 @@
                 </a:solidFill>
                 <a:latin typeface="Malgun Gothic"/>
               </a:rPr>
-              <a:t>33</a:t>
+              <a:t>34</a:t>
             </a:r>
           </a:p>
         </p:txBody>
@@ -40239,7 +40401,7 @@
                 </a:solidFill>
                 <a:latin typeface="Malgun Gothic"/>
               </a:rPr>
-              <a:t>It rides out a slow connection by itself</a:t>
+              <a:t>Using Judgment Training in class</a:t>
             </a:r>
           </a:p>
         </p:txBody>
@@ -40278,7 +40440,7 @@
                 </a:solidFill>
                 <a:latin typeface="Malgun Gothic"/>
               </a:rPr>
-              <a:t>37</a:t>
+              <a:t>38</a:t>
             </a:r>
           </a:p>
         </p:txBody>
@@ -40361,7 +40523,7 @@
                 </a:solidFill>
                 <a:latin typeface="Malgun Gothic"/>
               </a:rPr>
-              <a:t>34</a:t>
+              <a:t>35</a:t>
             </a:r>
           </a:p>
         </p:txBody>
@@ -40400,7 +40562,7 @@
                 </a:solidFill>
                 <a:latin typeface="Malgun Gothic"/>
               </a:rPr>
-              <a:t>Using Judgment Training in class</a:t>
+              <a:t>Replay a recorded lesson</a:t>
             </a:r>
           </a:p>
         </p:txBody>
@@ -40439,7 +40601,7 @@
                 </a:solidFill>
                 <a:latin typeface="Malgun Gothic"/>
               </a:rPr>
-              <a:t>38</a:t>
+              <a:t>39</a:t>
             </a:r>
           </a:p>
         </p:txBody>
@@ -40522,7 +40684,7 @@
                 </a:solidFill>
                 <a:latin typeface="Malgun Gothic"/>
               </a:rPr>
-              <a:t>35</a:t>
+              <a:t>36</a:t>
             </a:r>
           </a:p>
         </p:txBody>
@@ -40561,7 +40723,7 @@
                 </a:solidFill>
                 <a:latin typeface="Malgun Gothic"/>
               </a:rPr>
-              <a:t>Replay a recorded lesson</a:t>
+              <a:t>Your account (password · interface language)</a:t>
             </a:r>
           </a:p>
         </p:txBody>
@@ -40600,7 +40762,7 @@
                 </a:solidFill>
                 <a:latin typeface="Malgun Gothic"/>
               </a:rPr>
-              <a:t>39</a:t>
+              <a:t>40</a:t>
             </a:r>
           </a:p>
         </p:txBody>
@@ -40683,7 +40845,7 @@
                 </a:solidFill>
                 <a:latin typeface="Malgun Gothic"/>
               </a:rPr>
-              <a:t>36</a:t>
+              <a:t>37</a:t>
             </a:r>
           </a:p>
         </p:txBody>
@@ -40722,7 +40884,7 @@
                 </a:solidFill>
                 <a:latin typeface="Malgun Gothic"/>
               </a:rPr>
-              <a:t>Your account (password · interface language)</a:t>
+              <a:t>Parent Monthly Report (built from your evaluations)</a:t>
             </a:r>
           </a:p>
         </p:txBody>
@@ -40761,7 +40923,7 @@
                 </a:solidFill>
                 <a:latin typeface="Malgun Gothic"/>
               </a:rPr>
-              <a:t>40</a:t>
+              <a:t>41</a:t>
             </a:r>
           </a:p>
         </p:txBody>
@@ -40844,7 +41006,7 @@
                 </a:solidFill>
                 <a:latin typeface="Malgun Gothic"/>
               </a:rPr>
-              <a:t>37</a:t>
+              <a:t>38</a:t>
             </a:r>
           </a:p>
         </p:txBody>
@@ -40922,7 +41084,7 @@
                 </a:solidFill>
                 <a:latin typeface="Malgun Gothic"/>
               </a:rPr>
-              <a:t>41</a:t>
+              <a:t>42</a:t>
             </a:r>
           </a:p>
         </p:txBody>
@@ -41005,7 +41167,7 @@
                 </a:solidFill>
                 <a:latin typeface="Malgun Gothic"/>
               </a:rPr>
-              <a:t>38</a:t>
+              <a:t>39</a:t>
             </a:r>
           </a:p>
         </p:txBody>
@@ -41083,7 +41245,7 @@
                 </a:solidFill>
                 <a:latin typeface="Malgun Gothic"/>
               </a:rPr>
-              <a:t>42</a:t>
+              <a:t>43</a:t>
             </a:r>
           </a:p>
         </p:txBody>
@@ -41166,7 +41328,7 @@
                 </a:solidFill>
                 <a:latin typeface="Malgun Gothic"/>
               </a:rPr>
-              <a:t>39</a:t>
+              <a:t>40</a:t>
             </a:r>
           </a:p>
         </p:txBody>
@@ -41244,7 +41406,7 @@
                 </a:solidFill>
                 <a:latin typeface="Malgun Gothic"/>
               </a:rPr>
-              <a:t>43</a:t>
+              <a:t>44</a:t>
             </a:r>
           </a:p>
         </p:txBody>
@@ -41327,7 +41489,7 @@
                 </a:solidFill>
                 <a:latin typeface="Malgun Gothic"/>
               </a:rPr>
-              <a:t>40</a:t>
+              <a:t>41</a:t>
             </a:r>
           </a:p>
         </p:txBody>
@@ -41405,7 +41567,7 @@
                 </a:solidFill>
                 <a:latin typeface="Malgun Gothic"/>
               </a:rPr>
-              <a:t>44</a:t>
+              <a:t>45</a:t>
             </a:r>
           </a:p>
         </p:txBody>
@@ -41488,7 +41650,7 @@
                 </a:solidFill>
                 <a:latin typeface="Malgun Gothic"/>
               </a:rPr>
-              <a:t>41</a:t>
+              <a:t>42</a:t>
             </a:r>
           </a:p>
         </p:txBody>
@@ -41566,7 +41728,7 @@
                 </a:solidFill>
                 <a:latin typeface="Malgun Gothic"/>
               </a:rPr>
-              <a:t>45</a:t>
+              <a:t>46</a:t>
             </a:r>
           </a:p>
         </p:txBody>
@@ -42715,7 +42877,7 @@
                 </a:solidFill>
                 <a:latin typeface="Malgun Gothic"/>
               </a:rPr>
-              <a:t>Feature Summary · Data</a:t>
+              <a:t>How to Use the Main Features</a:t>
             </a:r>
           </a:p>
         </p:txBody>
@@ -42728,8 +42890,8 @@
         </p:nvSpPr>
         <p:spPr>
           <a:xfrm>
-            <a:off x="365760" y="841248"/>
-            <a:ext cx="658368" cy="512064"/>
+            <a:off x="365760" y="822960"/>
+            <a:ext cx="868680" cy="868680"/>
           </a:xfrm>
           <a:prstGeom prst="roundRect">
             <a:avLst/>
@@ -42772,9 +42934,938 @@
         </p:nvSpPr>
         <p:spPr>
           <a:xfrm>
+            <a:off x="365760" y="822960"/>
+            <a:ext cx="868680" cy="868680"/>
+          </a:xfrm>
+          <a:prstGeom prst="rect">
+            <a:avLst/>
+          </a:prstGeom>
+          <a:noFill/>
+        </p:spPr>
+        <p:txBody>
+          <a:bodyPr wrap="square" anchor="ctr">
+            <a:spAutoFit/>
+          </a:bodyPr>
+          <a:lstStyle/>
+          <a:p>
+            <a:pPr algn="ctr">
+              <a:lnSpc>
+                <a:spcPct val="100000"/>
+              </a:lnSpc>
+            </a:pPr>
+            <a:r>
+              <a:rPr sz="2600" b="1">
+                <a:solidFill>
+                  <a:srgbClr val="FFFFFF"/>
+                </a:solidFill>
+                <a:latin typeface="Malgun Gothic"/>
+              </a:rPr>
+              <a:t>37</a:t>
+            </a:r>
+          </a:p>
+        </p:txBody>
+      </p:sp>
+      <p:sp>
+        <p:nvSpPr>
+          <p:cNvPr id="8" name="TextBox 7"/>
+          <p:cNvSpPr txBox="1"/>
+          <p:nvPr/>
+        </p:nvSpPr>
+        <p:spPr>
+          <a:xfrm>
+            <a:off x="1371600" y="822960"/>
+            <a:ext cx="10424160" cy="502920"/>
+          </a:xfrm>
+          <a:prstGeom prst="rect">
+            <a:avLst/>
+          </a:prstGeom>
+          <a:noFill/>
+        </p:spPr>
+        <p:txBody>
+          <a:bodyPr wrap="square" anchor="t">
+            <a:spAutoFit/>
+          </a:bodyPr>
+          <a:lstStyle/>
+          <a:p>
+            <a:pPr algn="l">
+              <a:lnSpc>
+                <a:spcPct val="100000"/>
+              </a:lnSpc>
+            </a:pPr>
+            <a:r>
+              <a:rPr sz="2300" b="1">
+                <a:solidFill>
+                  <a:srgbClr val="1E2340"/>
+                </a:solidFill>
+                <a:latin typeface="Malgun Gothic"/>
+              </a:rPr>
+              <a:t>🌟 Parent Monthly Report (built from your evaluations)</a:t>
+            </a:r>
+          </a:p>
+        </p:txBody>
+      </p:sp>
+      <p:sp>
+        <p:nvSpPr>
+          <p:cNvPr id="9" name="TextBox 8"/>
+          <p:cNvSpPr txBox="1"/>
+          <p:nvPr/>
+        </p:nvSpPr>
+        <p:spPr>
+          <a:xfrm>
+            <a:off x="1417320" y="1353312"/>
+            <a:ext cx="10424160" cy="320040"/>
+          </a:xfrm>
+          <a:prstGeom prst="rect">
+            <a:avLst/>
+          </a:prstGeom>
+          <a:noFill/>
+        </p:spPr>
+        <p:txBody>
+          <a:bodyPr wrap="square" anchor="t">
+            <a:spAutoFit/>
+          </a:bodyPr>
+          <a:lstStyle/>
+          <a:p>
+            <a:pPr algn="l">
+              <a:lnSpc>
+                <a:spcPct val="100000"/>
+              </a:lnSpc>
+            </a:pPr>
+            <a:r>
+              <a:rPr sz="1300" b="0">
+                <a:solidFill>
+                  <a:srgbClr val="64748B"/>
+                </a:solidFill>
+                <a:latin typeface="Malgun Gothic"/>
+              </a:rPr>
+              <a:t>The five axes come from the evaluations you leave</a:t>
+            </a:r>
+          </a:p>
+        </p:txBody>
+      </p:sp>
+      <p:sp>
+        <p:nvSpPr>
+          <p:cNvPr id="10" name="Rounded Rectangle 9"/>
+          <p:cNvSpPr/>
+          <p:nvPr/>
+        </p:nvSpPr>
+        <p:spPr>
+          <a:xfrm>
+            <a:off x="365760" y="1828800"/>
+            <a:ext cx="11430000" cy="777240"/>
+          </a:xfrm>
+          <a:prstGeom prst="roundRect">
+            <a:avLst/>
+          </a:prstGeom>
+          <a:solidFill>
+            <a:srgbClr val="FFF4E6"/>
+          </a:solidFill>
+          <a:ln>
+            <a:noFill/>
+          </a:ln>
+          <a:effectLst/>
+        </p:spPr>
+        <p:style>
+          <a:lnRef idx="1">
+            <a:schemeClr val="accent1"/>
+          </a:lnRef>
+          <a:fillRef idx="3">
+            <a:schemeClr val="accent1"/>
+          </a:fillRef>
+          <a:effectRef idx="2">
+            <a:schemeClr val="accent1"/>
+          </a:effectRef>
+          <a:fontRef idx="minor">
+            <a:schemeClr val="lt1"/>
+          </a:fontRef>
+        </p:style>
+        <p:txBody>
+          <a:bodyPr rtlCol="0" anchor="ctr"/>
+          <a:lstStyle/>
+          <a:p>
+            <a:pPr algn="ctr"/>
+          </a:p>
+        </p:txBody>
+      </p:sp>
+      <p:sp>
+        <p:nvSpPr>
+          <p:cNvPr id="11" name="TextBox 10"/>
+          <p:cNvSpPr txBox="1"/>
+          <p:nvPr/>
+        </p:nvSpPr>
+        <p:spPr>
+          <a:xfrm>
+            <a:off x="548640" y="1901952"/>
+            <a:ext cx="11064240" cy="640080"/>
+          </a:xfrm>
+          <a:prstGeom prst="rect">
+            <a:avLst/>
+          </a:prstGeom>
+          <a:noFill/>
+        </p:spPr>
+        <p:txBody>
+          <a:bodyPr wrap="square" anchor="t">
+            <a:spAutoFit/>
+          </a:bodyPr>
+          <a:lstStyle/>
+          <a:p>
+            <a:pPr algn="l">
+              <a:lnSpc>
+                <a:spcPct val="115000"/>
+              </a:lnSpc>
+            </a:pPr>
+            <a:r>
+              <a:rPr sz="1200" b="0">
+                <a:solidFill>
+                  <a:srgbClr val="334155"/>
+                </a:solidFill>
+                <a:latin typeface="Malgun Gothic"/>
+              </a:rPr>
+              <a:t>The five axes of the pentagon monthly report parents receive (Pronunciation &amp; Fluency / Vocabulary / Sentence Building / Class Attitude / Participation) are filled from the lesson evaluations and pronunciation records you leave. The more consistently you evaluate, the more accurate and complete the report. The Teacher's Note is an AI draft you review and adjust before it goes out.</a:t>
+            </a:r>
+          </a:p>
+        </p:txBody>
+      </p:sp>
+      <p:sp>
+        <p:nvSpPr>
+          <p:cNvPr id="12" name="TextBox 11"/>
+          <p:cNvSpPr txBox="1"/>
+          <p:nvPr/>
+        </p:nvSpPr>
+        <p:spPr>
+          <a:xfrm>
+            <a:off x="457200" y="2743200"/>
+            <a:ext cx="5669280" cy="320040"/>
+          </a:xfrm>
+          <a:prstGeom prst="rect">
+            <a:avLst/>
+          </a:prstGeom>
+          <a:noFill/>
+        </p:spPr>
+        <p:txBody>
+          <a:bodyPr wrap="square" anchor="t">
+            <a:spAutoFit/>
+          </a:bodyPr>
+          <a:lstStyle/>
+          <a:p>
+            <a:pPr algn="l">
+              <a:lnSpc>
+                <a:spcPct val="100000"/>
+              </a:lnSpc>
+            </a:pPr>
+            <a:r>
+              <a:rPr sz="1350" b="1">
+                <a:solidFill>
+                  <a:srgbClr val="EA580C"/>
+                </a:solidFill>
+                <a:latin typeface="Malgun Gothic"/>
+              </a:rPr>
+              <a:t>How to use</a:t>
+            </a:r>
+          </a:p>
+        </p:txBody>
+      </p:sp>
+      <p:sp>
+        <p:nvSpPr>
+          <p:cNvPr id="13" name="TextBox 12"/>
+          <p:cNvSpPr txBox="1"/>
+          <p:nvPr/>
+        </p:nvSpPr>
+        <p:spPr>
+          <a:xfrm>
+            <a:off x="457200" y="3108960"/>
+            <a:ext cx="5669280" cy="2377440"/>
+          </a:xfrm>
+          <a:prstGeom prst="rect">
+            <a:avLst/>
+          </a:prstGeom>
+          <a:noFill/>
+        </p:spPr>
+        <p:txBody>
+          <a:bodyPr wrap="square">
+            <a:spAutoFit/>
+          </a:bodyPr>
+          <a:lstStyle/>
+          <a:p>
+            <a:pPr>
+              <a:lnSpc>
+                <a:spcPct val="115000"/>
+              </a:lnSpc>
+              <a:spcAft>
+                <a:spcPts val="600"/>
+              </a:spcAft>
+            </a:pPr>
+            <a:r>
+              <a:rPr sz="1050" b="1">
+                <a:solidFill>
+                  <a:srgbClr val="EA580C"/>
+                </a:solidFill>
+                <a:latin typeface="Malgun Gothic"/>
+              </a:rPr>
+              <a:t>● </a:t>
+            </a:r>
+            <a:r>
+              <a:rPr sz="1250">
+                <a:solidFill>
+                  <a:srgbClr val="334155"/>
+                </a:solidFill>
+                <a:latin typeface="Malgun Gothic"/>
+              </a:rPr>
+              <a:t>Fill in the lesson evaluation conscientiously, as usual.</a:t>
+            </a:r>
+          </a:p>
+          <a:p>
+            <a:pPr>
+              <a:lnSpc>
+                <a:spcPct val="115000"/>
+              </a:lnSpc>
+              <a:spcAft>
+                <a:spcPts val="600"/>
+              </a:spcAft>
+            </a:pPr>
+            <a:r>
+              <a:rPr sz="1050" b="1">
+                <a:solidFill>
+                  <a:srgbClr val="EA580C"/>
+                </a:solidFill>
+                <a:latin typeface="Malgun Gothic"/>
+              </a:rPr>
+              <a:t>● </a:t>
+            </a:r>
+            <a:r>
+              <a:rPr sz="1250">
+                <a:solidFill>
+                  <a:srgbClr val="334155"/>
+                </a:solidFill>
+                <a:latin typeface="Malgun Gothic"/>
+              </a:rPr>
+              <a:t>Pronunciation practice and judgment-training records feed the axes automatically.</a:t>
+            </a:r>
+          </a:p>
+          <a:p>
+            <a:pPr>
+              <a:lnSpc>
+                <a:spcPct val="115000"/>
+              </a:lnSpc>
+              <a:spcAft>
+                <a:spcPts val="600"/>
+              </a:spcAft>
+            </a:pPr>
+            <a:r>
+              <a:rPr sz="1050" b="1">
+                <a:solidFill>
+                  <a:srgbClr val="EA580C"/>
+                </a:solidFill>
+                <a:latin typeface="Malgun Gothic"/>
+              </a:rPr>
+              <a:t>● </a:t>
+            </a:r>
+            <a:r>
+              <a:rPr sz="1250">
+                <a:solidFill>
+                  <a:srgbClr val="334155"/>
+                </a:solidFill>
+                <a:latin typeface="Malgun Gothic"/>
+              </a:rPr>
+              <a:t>Review and refine the Teacher's Note AI draft on the report.</a:t>
+            </a:r>
+          </a:p>
+          <a:p>
+            <a:pPr>
+              <a:lnSpc>
+                <a:spcPct val="115000"/>
+              </a:lnSpc>
+              <a:spcAft>
+                <a:spcPts val="600"/>
+              </a:spcAft>
+            </a:pPr>
+            <a:r>
+              <a:rPr sz="1050" b="1">
+                <a:solidFill>
+                  <a:srgbClr val="EA580C"/>
+                </a:solidFill>
+                <a:latin typeface="Malgun Gothic"/>
+              </a:rPr>
+              <a:t>● </a:t>
+            </a:r>
+            <a:r>
+              <a:rPr sz="1250">
+                <a:solidFill>
+                  <a:srgbClr val="334155"/>
+                </a:solidFill>
+                <a:latin typeface="Malgun Gothic"/>
+              </a:rPr>
+              <a:t>Preview to confirm the pentagon is well filled in.</a:t>
+            </a:r>
+          </a:p>
+        </p:txBody>
+      </p:sp>
+      <p:sp>
+        <p:nvSpPr>
+          <p:cNvPr id="14" name="Rounded Rectangle 13"/>
+          <p:cNvSpPr/>
+          <p:nvPr/>
+        </p:nvSpPr>
+        <p:spPr>
+          <a:xfrm>
+            <a:off x="457200" y="4782312"/>
+            <a:ext cx="5669280" cy="1005840"/>
+          </a:xfrm>
+          <a:prstGeom prst="roundRect">
+            <a:avLst/>
+          </a:prstGeom>
+          <a:solidFill>
+            <a:srgbClr val="F4F7FF"/>
+          </a:solidFill>
+          <a:ln w="12700">
+            <a:solidFill>
+              <a:srgbClr val="EA580C"/>
+            </a:solidFill>
+          </a:ln>
+          <a:effectLst/>
+        </p:spPr>
+        <p:style>
+          <a:lnRef idx="1">
+            <a:schemeClr val="accent1"/>
+          </a:lnRef>
+          <a:fillRef idx="3">
+            <a:schemeClr val="accent1"/>
+          </a:fillRef>
+          <a:effectRef idx="2">
+            <a:schemeClr val="accent1"/>
+          </a:effectRef>
+          <a:fontRef idx="minor">
+            <a:schemeClr val="lt1"/>
+          </a:fontRef>
+        </p:style>
+        <p:txBody>
+          <a:bodyPr rtlCol="0" anchor="ctr"/>
+          <a:lstStyle/>
+          <a:p>
+            <a:pPr algn="ctr"/>
+          </a:p>
+        </p:txBody>
+      </p:sp>
+      <p:sp>
+        <p:nvSpPr>
+          <p:cNvPr id="15" name="TextBox 14"/>
+          <p:cNvSpPr txBox="1"/>
+          <p:nvPr/>
+        </p:nvSpPr>
+        <p:spPr>
+          <a:xfrm>
+            <a:off x="594360" y="4837175"/>
+            <a:ext cx="5394960" cy="274320"/>
+          </a:xfrm>
+          <a:prstGeom prst="rect">
+            <a:avLst/>
+          </a:prstGeom>
+          <a:noFill/>
+        </p:spPr>
+        <p:txBody>
+          <a:bodyPr wrap="square" anchor="t">
+            <a:spAutoFit/>
+          </a:bodyPr>
+          <a:lstStyle/>
+          <a:p>
+            <a:pPr algn="l">
+              <a:lnSpc>
+                <a:spcPct val="100000"/>
+              </a:lnSpc>
+            </a:pPr>
+            <a:r>
+              <a:rPr sz="1150" b="1">
+                <a:solidFill>
+                  <a:srgbClr val="EA580C"/>
+                </a:solidFill>
+                <a:latin typeface="Malgun Gothic"/>
+              </a:rPr>
+              <a:t>✅ Key Points</a:t>
+            </a:r>
+          </a:p>
+        </p:txBody>
+      </p:sp>
+      <p:sp>
+        <p:nvSpPr>
+          <p:cNvPr id="16" name="TextBox 15"/>
+          <p:cNvSpPr txBox="1"/>
+          <p:nvPr/>
+        </p:nvSpPr>
+        <p:spPr>
+          <a:xfrm>
+            <a:off x="594360" y="5111496"/>
+            <a:ext cx="5394960" cy="640080"/>
+          </a:xfrm>
+          <a:prstGeom prst="rect">
+            <a:avLst/>
+          </a:prstGeom>
+          <a:noFill/>
+        </p:spPr>
+        <p:txBody>
+          <a:bodyPr wrap="square">
+            <a:spAutoFit/>
+          </a:bodyPr>
+          <a:lstStyle/>
+          <a:p>
+            <a:pPr>
+              <a:lnSpc>
+                <a:spcPct val="115000"/>
+              </a:lnSpc>
+              <a:spcAft>
+                <a:spcPts val="200"/>
+              </a:spcAft>
+            </a:pPr>
+            <a:r>
+              <a:rPr sz="900" b="1">
+                <a:solidFill>
+                  <a:srgbClr val="EA580C"/>
+                </a:solidFill>
+                <a:latin typeface="Malgun Gothic"/>
+              </a:rPr>
+              <a:t>● </a:t>
+            </a:r>
+            <a:r>
+              <a:rPr sz="1100">
+                <a:solidFill>
+                  <a:srgbClr val="334155"/>
+                </a:solidFill>
+                <a:latin typeface="Malgun Gothic"/>
+              </a:rPr>
+              <a:t>Only axes with values are filled — no evaluation means that axis looks empty.</a:t>
+            </a:r>
+          </a:p>
+          <a:p>
+            <a:pPr>
+              <a:lnSpc>
+                <a:spcPct val="115000"/>
+              </a:lnSpc>
+              <a:spcAft>
+                <a:spcPts val="200"/>
+              </a:spcAft>
+            </a:pPr>
+            <a:r>
+              <a:rPr sz="900" b="1">
+                <a:solidFill>
+                  <a:srgbClr val="EA580C"/>
+                </a:solidFill>
+                <a:latin typeface="Malgun Gothic"/>
+              </a:rPr>
+              <a:t>● </a:t>
+            </a:r>
+            <a:r>
+              <a:rPr sz="1100">
+                <a:solidFill>
+                  <a:srgbClr val="334155"/>
+                </a:solidFill>
+                <a:latin typeface="Malgun Gothic"/>
+              </a:rPr>
+              <a:t>Consistent evaluations matter more than a long comment.</a:t>
+            </a:r>
+          </a:p>
+        </p:txBody>
+      </p:sp>
+      <p:sp>
+        <p:nvSpPr>
+          <p:cNvPr id="17" name="Rounded Rectangle 16"/>
+          <p:cNvSpPr/>
+          <p:nvPr/>
+        </p:nvSpPr>
+        <p:spPr>
+          <a:xfrm>
+            <a:off x="457200" y="5897879"/>
+            <a:ext cx="5669280" cy="658368"/>
+          </a:xfrm>
+          <a:prstGeom prst="roundRect">
+            <a:avLst/>
+          </a:prstGeom>
+          <a:solidFill>
+            <a:srgbClr val="FFF7E6"/>
+          </a:solidFill>
+          <a:ln w="12700">
+            <a:solidFill>
+              <a:srgbClr val="FFB020"/>
+            </a:solidFill>
+          </a:ln>
+          <a:effectLst/>
+        </p:spPr>
+        <p:style>
+          <a:lnRef idx="1">
+            <a:schemeClr val="accent1"/>
+          </a:lnRef>
+          <a:fillRef idx="3">
+            <a:schemeClr val="accent1"/>
+          </a:fillRef>
+          <a:effectRef idx="2">
+            <a:schemeClr val="accent1"/>
+          </a:effectRef>
+          <a:fontRef idx="minor">
+            <a:schemeClr val="lt1"/>
+          </a:fontRef>
+        </p:style>
+        <p:txBody>
+          <a:bodyPr rtlCol="0" anchor="ctr"/>
+          <a:lstStyle/>
+          <a:p>
+            <a:pPr algn="ctr"/>
+          </a:p>
+        </p:txBody>
+      </p:sp>
+      <p:sp>
+        <p:nvSpPr>
+          <p:cNvPr id="18" name="TextBox 17"/>
+          <p:cNvSpPr txBox="1"/>
+          <p:nvPr/>
+        </p:nvSpPr>
+        <p:spPr>
+          <a:xfrm>
+            <a:off x="594360" y="5943599"/>
+            <a:ext cx="5394960" cy="566928"/>
+          </a:xfrm>
+          <a:prstGeom prst="rect">
+            <a:avLst/>
+          </a:prstGeom>
+          <a:noFill/>
+        </p:spPr>
+        <p:txBody>
+          <a:bodyPr wrap="square" anchor="t">
+            <a:spAutoFit/>
+          </a:bodyPr>
+          <a:lstStyle/>
+          <a:p>
+            <a:pPr algn="l">
+              <a:lnSpc>
+                <a:spcPct val="105000"/>
+              </a:lnSpc>
+            </a:pPr>
+            <a:r>
+              <a:rPr sz="1050" b="0">
+                <a:solidFill>
+                  <a:srgbClr val="5B4A2A"/>
+                </a:solidFill>
+                <a:latin typeface="Malgun Gothic"/>
+              </a:rPr>
+              <a:t>💡 Tip · Even a one-line evaluation each lesson makes the month-end report complete itself.</a:t>
+            </a:r>
+          </a:p>
+        </p:txBody>
+      </p:sp>
+      <p:sp>
+        <p:nvSpPr>
+          <p:cNvPr id="19" name="Rectangle 18"/>
+          <p:cNvSpPr/>
+          <p:nvPr/>
+        </p:nvSpPr>
+        <p:spPr>
+          <a:xfrm>
+            <a:off x="6300216" y="2345436"/>
+            <a:ext cx="5596128" cy="3538728"/>
+          </a:xfrm>
+          <a:prstGeom prst="rect">
+            <a:avLst/>
+          </a:prstGeom>
+          <a:solidFill>
+            <a:srgbClr val="FFFFFF"/>
+          </a:solidFill>
+          <a:ln w="12700">
+            <a:solidFill>
+              <a:srgbClr val="E2E8F0"/>
+            </a:solidFill>
+          </a:ln>
+          <a:effectLst/>
+        </p:spPr>
+        <p:style>
+          <a:lnRef idx="1">
+            <a:schemeClr val="accent1"/>
+          </a:lnRef>
+          <a:fillRef idx="3">
+            <a:schemeClr val="accent1"/>
+          </a:fillRef>
+          <a:effectRef idx="2">
+            <a:schemeClr val="accent1"/>
+          </a:effectRef>
+          <a:fontRef idx="minor">
+            <a:schemeClr val="lt1"/>
+          </a:fontRef>
+        </p:style>
+        <p:txBody>
+          <a:bodyPr rtlCol="0" anchor="ctr"/>
+          <a:lstStyle/>
+          <a:p>
+            <a:pPr algn="ctr"/>
+          </a:p>
+        </p:txBody>
+      </p:sp>
+      <p:pic>
+        <p:nvPicPr>
+          <p:cNvPr id="20" name="Picture 19" descr="student_report_pentagon.jpg"/>
+          <p:cNvPicPr>
+            <a:picLocks noChangeAspect="1"/>
+          </p:cNvPicPr>
+          <p:nvPr/>
+        </p:nvPicPr>
+        <p:blipFill>
+          <a:blip r:embed="rId2"/>
+          <a:stretch>
+            <a:fillRect/>
+          </a:stretch>
+        </p:blipFill>
+        <p:spPr>
+          <a:xfrm>
+            <a:off x="6355080" y="2400300"/>
+            <a:ext cx="5486400" cy="3429000"/>
+          </a:xfrm>
+          <a:prstGeom prst="rect">
+            <a:avLst/>
+          </a:prstGeom>
+        </p:spPr>
+      </p:pic>
+    </p:spTree>
+  </p:cSld>
+  <p:clrMapOvr>
+    <a:masterClrMapping/>
+  </p:clrMapOvr>
+</p:sld>
+</file>
+
+<file path=ppt/slides/slide42.xml><?xml version="1.0" encoding="utf-8"?>
+<p:sld xmlns:a="http://schemas.openxmlformats.org/drawingml/2006/main" xmlns:p="http://schemas.openxmlformats.org/presentationml/2006/main" xmlns:r="http://schemas.openxmlformats.org/officeDocument/2006/relationships">
+  <p:cSld>
+    <p:bg>
+      <p:bgPr>
+        <a:solidFill>
+          <a:srgbClr val="FFFFFF"/>
+        </a:solidFill>
+        <a:effectLst/>
+      </p:bgPr>
+    </p:bg>
+    <p:spTree>
+      <p:nvGrpSpPr>
+        <p:cNvPr id="1" name=""/>
+        <p:cNvGrpSpPr/>
+        <p:nvPr/>
+      </p:nvGrpSpPr>
+      <p:grpSpPr/>
+      <p:sp>
+        <p:nvSpPr>
+          <p:cNvPr id="2" name="Rectangle 1"/>
+          <p:cNvSpPr/>
+          <p:nvPr/>
+        </p:nvSpPr>
+        <p:spPr>
+          <a:xfrm>
+            <a:off x="0" y="0"/>
+            <a:ext cx="12191695" cy="566928"/>
+          </a:xfrm>
+          <a:prstGeom prst="rect">
+            <a:avLst/>
+          </a:prstGeom>
+          <a:solidFill>
+            <a:srgbClr val="EA580C"/>
+          </a:solidFill>
+          <a:ln>
+            <a:noFill/>
+          </a:ln>
+          <a:effectLst/>
+        </p:spPr>
+        <p:style>
+          <a:lnRef idx="1">
+            <a:schemeClr val="accent1"/>
+          </a:lnRef>
+          <a:fillRef idx="3">
+            <a:schemeClr val="accent1"/>
+          </a:fillRef>
+          <a:effectRef idx="2">
+            <a:schemeClr val="accent1"/>
+          </a:effectRef>
+          <a:fontRef idx="minor">
+            <a:schemeClr val="lt1"/>
+          </a:fontRef>
+        </p:style>
+        <p:txBody>
+          <a:bodyPr rtlCol="0" anchor="ctr"/>
+          <a:lstStyle/>
+          <a:p>
+            <a:pPr algn="ctr"/>
+          </a:p>
+        </p:txBody>
+      </p:sp>
+      <p:sp>
+        <p:nvSpPr>
+          <p:cNvPr id="3" name="Rectangle 2"/>
+          <p:cNvSpPr/>
+          <p:nvPr/>
+        </p:nvSpPr>
+        <p:spPr>
+          <a:xfrm>
+            <a:off x="0" y="566928"/>
+            <a:ext cx="12191695" cy="54864"/>
+          </a:xfrm>
+          <a:prstGeom prst="rect">
+            <a:avLst/>
+          </a:prstGeom>
+          <a:solidFill>
+            <a:srgbClr val="FFB020"/>
+          </a:solidFill>
+          <a:ln>
+            <a:noFill/>
+          </a:ln>
+          <a:effectLst/>
+        </p:spPr>
+        <p:style>
+          <a:lnRef idx="1">
+            <a:schemeClr val="accent1"/>
+          </a:lnRef>
+          <a:fillRef idx="3">
+            <a:schemeClr val="accent1"/>
+          </a:fillRef>
+          <a:effectRef idx="2">
+            <a:schemeClr val="accent1"/>
+          </a:effectRef>
+          <a:fontRef idx="minor">
+            <a:schemeClr val="lt1"/>
+          </a:fontRef>
+        </p:style>
+        <p:txBody>
+          <a:bodyPr rtlCol="0" anchor="ctr"/>
+          <a:lstStyle/>
+          <a:p>
+            <a:pPr algn="ctr"/>
+          </a:p>
+        </p:txBody>
+      </p:sp>
+      <p:sp>
+        <p:nvSpPr>
+          <p:cNvPr id="4" name="TextBox 3"/>
+          <p:cNvSpPr txBox="1"/>
+          <p:nvPr/>
+        </p:nvSpPr>
+        <p:spPr>
+          <a:xfrm>
+            <a:off x="365760" y="27432"/>
+            <a:ext cx="7315200" cy="502920"/>
+          </a:xfrm>
+          <a:prstGeom prst="rect">
+            <a:avLst/>
+          </a:prstGeom>
+          <a:noFill/>
+        </p:spPr>
+        <p:txBody>
+          <a:bodyPr wrap="square" anchor="ctr">
+            <a:spAutoFit/>
+          </a:bodyPr>
+          <a:lstStyle/>
+          <a:p>
+            <a:pPr algn="l">
+              <a:lnSpc>
+                <a:spcPct val="100000"/>
+              </a:lnSpc>
+            </a:pPr>
+            <a:r>
+              <a:rPr sz="1500" b="1">
+                <a:solidFill>
+                  <a:srgbClr val="FFFFFF"/>
+                </a:solidFill>
+                <a:latin typeface="Malgun Gothic"/>
+              </a:rPr>
+              <a:t>👩‍🏫 Mangoi Teacher User Guide</a:t>
+            </a:r>
+          </a:p>
+        </p:txBody>
+      </p:sp>
+      <p:sp>
+        <p:nvSpPr>
+          <p:cNvPr id="5" name="TextBox 4"/>
+          <p:cNvSpPr txBox="1"/>
+          <p:nvPr/>
+        </p:nvSpPr>
+        <p:spPr>
+          <a:xfrm>
+            <a:off x="8168335" y="27432"/>
+            <a:ext cx="3657600" cy="502920"/>
+          </a:xfrm>
+          <a:prstGeom prst="rect">
+            <a:avLst/>
+          </a:prstGeom>
+          <a:noFill/>
+        </p:spPr>
+        <p:txBody>
+          <a:bodyPr wrap="square" anchor="ctr">
+            <a:spAutoFit/>
+          </a:bodyPr>
+          <a:lstStyle/>
+          <a:p>
+            <a:pPr algn="r">
+              <a:lnSpc>
+                <a:spcPct val="100000"/>
+              </a:lnSpc>
+            </a:pPr>
+            <a:r>
+              <a:rPr sz="1300" b="1">
+                <a:solidFill>
+                  <a:srgbClr val="F1F5F9"/>
+                </a:solidFill>
+                <a:latin typeface="Malgun Gothic"/>
+              </a:rPr>
+              <a:t>Feature Summary · Data</a:t>
+            </a:r>
+          </a:p>
+        </p:txBody>
+      </p:sp>
+      <p:sp>
+        <p:nvSpPr>
+          <p:cNvPr id="6" name="Rounded Rectangle 5"/>
+          <p:cNvSpPr/>
+          <p:nvPr/>
+        </p:nvSpPr>
+        <p:spPr>
+          <a:xfrm>
             <a:off x="365760" y="841248"/>
             <a:ext cx="658368" cy="512064"/>
           </a:xfrm>
+          <a:prstGeom prst="roundRect">
+            <a:avLst/>
+          </a:prstGeom>
+          <a:solidFill>
+            <a:srgbClr val="EA580C"/>
+          </a:solidFill>
+          <a:ln>
+            <a:noFill/>
+          </a:ln>
+          <a:effectLst/>
+        </p:spPr>
+        <p:style>
+          <a:lnRef idx="1">
+            <a:schemeClr val="accent1"/>
+          </a:lnRef>
+          <a:fillRef idx="3">
+            <a:schemeClr val="accent1"/>
+          </a:fillRef>
+          <a:effectRef idx="2">
+            <a:schemeClr val="accent1"/>
+          </a:effectRef>
+          <a:fontRef idx="minor">
+            <a:schemeClr val="lt1"/>
+          </a:fontRef>
+        </p:style>
+        <p:txBody>
+          <a:bodyPr rtlCol="0" anchor="ctr"/>
+          <a:lstStyle/>
+          <a:p>
+            <a:pPr algn="ctr"/>
+          </a:p>
+        </p:txBody>
+      </p:sp>
+      <p:sp>
+        <p:nvSpPr>
+          <p:cNvPr id="7" name="TextBox 6"/>
+          <p:cNvSpPr txBox="1"/>
+          <p:nvPr/>
+        </p:nvSpPr>
+        <p:spPr>
+          <a:xfrm>
+            <a:off x="365760" y="841248"/>
+            <a:ext cx="658368" cy="512064"/>
+          </a:xfrm>
           <a:prstGeom prst="rect">
             <a:avLst/>
           </a:prstGeom>
@@ -42798,7 +43889,7 @@
                 </a:solidFill>
                 <a:latin typeface="Malgun Gothic"/>
               </a:rPr>
-              <a:t>37</a:t>
+              <a:t>38</a:t>
             </a:r>
           </a:p>
         </p:txBody>
@@ -43818,7 +44909,7 @@
 </p:sld>
 </file>
 
-<file path=ppt/slides/slide42.xml><?xml version="1.0" encoding="utf-8"?>
+<file path=ppt/slides/slide43.xml><?xml version="1.0" encoding="utf-8"?>
 <p:sld xmlns:a="http://schemas.openxmlformats.org/drawingml/2006/main" xmlns:p="http://schemas.openxmlformats.org/presentationml/2006/main" xmlns:r="http://schemas.openxmlformats.org/officeDocument/2006/relationships">
   <p:cSld>
     <p:bg>
@@ -44080,7 +45171,7 @@
                 </a:solidFill>
                 <a:latin typeface="Malgun Gothic"/>
               </a:rPr>
-              <a:t>38</a:t>
+              <a:t>39</a:t>
             </a:r>
           </a:p>
         </p:txBody>
@@ -44246,7 +45337,7 @@
 </p:sld>
 </file>
 
-<file path=ppt/slides/slide43.xml><?xml version="1.0" encoding="utf-8"?>
+<file path=ppt/slides/slide44.xml><?xml version="1.0" encoding="utf-8"?>
 <p:sld xmlns:a="http://schemas.openxmlformats.org/drawingml/2006/main" xmlns:p="http://schemas.openxmlformats.org/presentationml/2006/main" xmlns:r="http://schemas.openxmlformats.org/officeDocument/2006/relationships">
   <p:cSld>
     <p:bg>
@@ -44508,7 +45599,7 @@
                 </a:solidFill>
                 <a:latin typeface="Malgun Gothic"/>
               </a:rPr>
-              <a:t>39</a:t>
+              <a:t>40</a:t>
             </a:r>
           </a:p>
         </p:txBody>
@@ -45304,7 +46395,7 @@
 </p:sld>
 </file>
 
-<file path=ppt/slides/slide44.xml><?xml version="1.0" encoding="utf-8"?>
+<file path=ppt/slides/slide45.xml><?xml version="1.0" encoding="utf-8"?>
 <p:sld xmlns:a="http://schemas.openxmlformats.org/drawingml/2006/main" xmlns:p="http://schemas.openxmlformats.org/presentationml/2006/main" xmlns:r="http://schemas.openxmlformats.org/officeDocument/2006/relationships">
   <p:cSld>
     <p:bg>
@@ -45566,7 +46657,7 @@
                 </a:solidFill>
                 <a:latin typeface="Malgun Gothic"/>
               </a:rPr>
-              <a:t>40</a:t>
+              <a:t>41</a:t>
             </a:r>
           </a:p>
         </p:txBody>
@@ -46322,7 +47413,7 @@
 </p:sld>
 </file>
 
-<file path=ppt/slides/slide45.xml><?xml version="1.0" encoding="utf-8"?>
+<file path=ppt/slides/slide46.xml><?xml version="1.0" encoding="utf-8"?>
 <p:sld xmlns:a="http://schemas.openxmlformats.org/drawingml/2006/main" xmlns:p="http://schemas.openxmlformats.org/presentationml/2006/main" xmlns:r="http://schemas.openxmlformats.org/officeDocument/2006/relationships">
   <p:cSld>
     <p:bg>
@@ -46584,7 +47675,7 @@
                 </a:solidFill>
                 <a:latin typeface="Malgun Gothic"/>
               </a:rPr>
-              <a:t>41</a:t>
+              <a:t>42</a:t>
             </a:r>
           </a:p>
         </p:txBody>
@@ -48195,7 +49286,7 @@
 </p:sld>
 </file>
 
-<file path=ppt/slides/slide46.xml><?xml version="1.0" encoding="utf-8"?>
+<file path=ppt/slides/slide47.xml><?xml version="1.0" encoding="utf-8"?>
 <p:sld xmlns:a="http://schemas.openxmlformats.org/drawingml/2006/main" xmlns:p="http://schemas.openxmlformats.org/presentationml/2006/main" xmlns:r="http://schemas.openxmlformats.org/officeDocument/2006/relationships">
   <p:cSld>
     <p:bg>
